--- a/livro_ia_educacao/saida/pptx/Cap25_slides.pptx
+++ b/livro_ia_educacao/saida/pptx/Cap25_slides.pptx
@@ -11272,11 +11272,11 @@
         <p:spPr>
           <a:xfrm>
             <a:off x="548640" y="1417320"/>
-            <a:ext cx="11064240" cy="762000"/>
+            <a:ext cx="11064240" cy="682752"/>
           </a:xfrm>
           <a:prstGeom prst="roundRect">
             <a:avLst>
-              <a:gd name="adj" fmla="val 14400"/>
+              <a:gd name="adj" fmla="val 16071"/>
             </a:avLst>
           </a:prstGeom>
           <a:solidFill>
@@ -11303,7 +11303,7 @@
         <p:spPr>
           <a:xfrm>
             <a:off x="731520" y="1417320"/>
-            <a:ext cx="548640" cy="762000"/>
+            <a:ext cx="548640" cy="682752"/>
           </a:xfrm>
           <a:prstGeom prst="rect">
             <a:avLst/>
@@ -11339,7 +11339,7 @@
         <p:spPr>
           <a:xfrm>
             <a:off x="1463040" y="1417320"/>
-            <a:ext cx="9966960" cy="762000"/>
+            <a:ext cx="9966960" cy="682752"/>
           </a:xfrm>
           <a:prstGeom prst="rect">
             <a:avLst/>
@@ -11374,12 +11374,12 @@
         </p:nvSpPr>
         <p:spPr>
           <a:xfrm>
-            <a:off x="548640" y="2289048"/>
-            <a:ext cx="11064240" cy="762000"/>
+            <a:off x="548640" y="2209800"/>
+            <a:ext cx="11064240" cy="682752"/>
           </a:xfrm>
           <a:prstGeom prst="roundRect">
             <a:avLst>
-              <a:gd name="adj" fmla="val 14400"/>
+              <a:gd name="adj" fmla="val 16071"/>
             </a:avLst>
           </a:prstGeom>
           <a:solidFill>
@@ -11405,8 +11405,8 @@
         </p:nvSpPr>
         <p:spPr>
           <a:xfrm>
-            <a:off x="731520" y="2289048"/>
-            <a:ext cx="548640" cy="762000"/>
+            <a:off x="731520" y="2209800"/>
+            <a:ext cx="548640" cy="682752"/>
           </a:xfrm>
           <a:prstGeom prst="rect">
             <a:avLst/>
@@ -11441,8 +11441,8 @@
         </p:nvSpPr>
         <p:spPr>
           <a:xfrm>
-            <a:off x="1463040" y="2289048"/>
-            <a:ext cx="9966960" cy="762000"/>
+            <a:off x="1463040" y="2209800"/>
+            <a:ext cx="9966960" cy="682752"/>
           </a:xfrm>
           <a:prstGeom prst="rect">
             <a:avLst/>
@@ -11477,12 +11477,12 @@
         </p:nvSpPr>
         <p:spPr>
           <a:xfrm>
-            <a:off x="548640" y="3160776"/>
-            <a:ext cx="11064240" cy="762000"/>
+            <a:off x="548640" y="3002280"/>
+            <a:ext cx="11064240" cy="682752"/>
           </a:xfrm>
           <a:prstGeom prst="roundRect">
             <a:avLst>
-              <a:gd name="adj" fmla="val 14400"/>
+              <a:gd name="adj" fmla="val 16071"/>
             </a:avLst>
           </a:prstGeom>
           <a:solidFill>
@@ -11508,8 +11508,8 @@
         </p:nvSpPr>
         <p:spPr>
           <a:xfrm>
-            <a:off x="731520" y="3160776"/>
-            <a:ext cx="548640" cy="762000"/>
+            <a:off x="731520" y="3002280"/>
+            <a:ext cx="548640" cy="682752"/>
           </a:xfrm>
           <a:prstGeom prst="rect">
             <a:avLst/>
@@ -11544,8 +11544,8 @@
         </p:nvSpPr>
         <p:spPr>
           <a:xfrm>
-            <a:off x="1463040" y="3160776"/>
-            <a:ext cx="9966960" cy="762000"/>
+            <a:off x="1463040" y="3002280"/>
+            <a:ext cx="9966960" cy="682752"/>
           </a:xfrm>
           <a:prstGeom prst="rect">
             <a:avLst/>
@@ -11580,12 +11580,12 @@
         </p:nvSpPr>
         <p:spPr>
           <a:xfrm>
-            <a:off x="548640" y="4032504"/>
-            <a:ext cx="11064240" cy="762000"/>
+            <a:off x="548640" y="3794760"/>
+            <a:ext cx="11064240" cy="682752"/>
           </a:xfrm>
           <a:prstGeom prst="roundRect">
             <a:avLst>
-              <a:gd name="adj" fmla="val 14400"/>
+              <a:gd name="adj" fmla="val 16071"/>
             </a:avLst>
           </a:prstGeom>
           <a:solidFill>
@@ -11611,8 +11611,8 @@
         </p:nvSpPr>
         <p:spPr>
           <a:xfrm>
-            <a:off x="731520" y="4032504"/>
-            <a:ext cx="548640" cy="762000"/>
+            <a:off x="731520" y="3794760"/>
+            <a:ext cx="548640" cy="682752"/>
           </a:xfrm>
           <a:prstGeom prst="rect">
             <a:avLst/>
@@ -11647,8 +11647,8 @@
         </p:nvSpPr>
         <p:spPr>
           <a:xfrm>
-            <a:off x="1463040" y="4032504"/>
-            <a:ext cx="9966960" cy="762000"/>
+            <a:off x="1463040" y="3794760"/>
+            <a:ext cx="9966960" cy="682752"/>
           </a:xfrm>
           <a:prstGeom prst="rect">
             <a:avLst/>
@@ -11683,12 +11683,12 @@
         </p:nvSpPr>
         <p:spPr>
           <a:xfrm>
-            <a:off x="548640" y="4904232"/>
-            <a:ext cx="11064240" cy="762000"/>
+            <a:off x="548640" y="4587240"/>
+            <a:ext cx="11064240" cy="682752"/>
           </a:xfrm>
           <a:prstGeom prst="roundRect">
             <a:avLst>
-              <a:gd name="adj" fmla="val 14400"/>
+              <a:gd name="adj" fmla="val 16071"/>
             </a:avLst>
           </a:prstGeom>
           <a:solidFill>
@@ -11714,8 +11714,8 @@
         </p:nvSpPr>
         <p:spPr>
           <a:xfrm>
-            <a:off x="731520" y="4904232"/>
-            <a:ext cx="548640" cy="762000"/>
+            <a:off x="731520" y="4587240"/>
+            <a:ext cx="548640" cy="682752"/>
           </a:xfrm>
           <a:prstGeom prst="rect">
             <a:avLst/>
@@ -11750,8 +11750,8 @@
         </p:nvSpPr>
         <p:spPr>
           <a:xfrm>
-            <a:off x="1463040" y="4904232"/>
-            <a:ext cx="9966960" cy="762000"/>
+            <a:off x="1463040" y="4587240"/>
+            <a:ext cx="9966960" cy="682752"/>
           </a:xfrm>
           <a:prstGeom prst="rect">
             <a:avLst/>
@@ -11786,12 +11786,12 @@
         </p:nvSpPr>
         <p:spPr>
           <a:xfrm>
-            <a:off x="548640" y="5775960"/>
-            <a:ext cx="11064240" cy="762000"/>
+            <a:off x="548640" y="5379720"/>
+            <a:ext cx="11064240" cy="682752"/>
           </a:xfrm>
           <a:prstGeom prst="roundRect">
             <a:avLst>
-              <a:gd name="adj" fmla="val 14400"/>
+              <a:gd name="adj" fmla="val 16071"/>
             </a:avLst>
           </a:prstGeom>
           <a:solidFill>
@@ -11817,8 +11817,8 @@
         </p:nvSpPr>
         <p:spPr>
           <a:xfrm>
-            <a:off x="731520" y="5775960"/>
-            <a:ext cx="548640" cy="762000"/>
+            <a:off x="731520" y="5379720"/>
+            <a:ext cx="548640" cy="682752"/>
           </a:xfrm>
           <a:prstGeom prst="rect">
             <a:avLst/>
@@ -11853,8 +11853,8 @@
         </p:nvSpPr>
         <p:spPr>
           <a:xfrm>
-            <a:off x="1463040" y="5775960"/>
-            <a:ext cx="9966960" cy="762000"/>
+            <a:off x="1463040" y="5379720"/>
+            <a:ext cx="9966960" cy="682752"/>
           </a:xfrm>
           <a:prstGeom prst="rect">
             <a:avLst/>
